--- a/skills/uav-paper-report/assets/examples/uav-rl-privileged-report.pptx
+++ b/skills/uav-paper-report/assets/examples/uav-rl-privileged-report.pptx
@@ -3099,7 +3099,7 @@
 </file>
 
 <file path=ppt/slides/slide1.xml><?xml version="1.0" encoding="utf-8"?>
-<p:sld xmlns:a="http://schemas.openxmlformats.org/drawingml/2006/main" xmlns:p="http://schemas.openxmlformats.org/presentationml/2006/main" xmlns:r="http://schemas.openxmlformats.org/officeDocument/2006/relationships">
+<p:sld xmlns:a="http://schemas.openxmlformats.org/drawingml/2006/main" xmlns:ns2="http://schemas.openxmlformats.org/officeDocument/2006/relationships" xmlns:p="http://schemas.openxmlformats.org/presentationml/2006/main">
   <p:cSld>
     <p:spTree>
       <p:nvGrpSpPr>
@@ -3117,7 +3117,7 @@
           <p:nvPr/>
         </p:nvPicPr>
         <p:blipFill>
-          <a:blip r:embed="rId2"/>
+          <a:blip ns2:embed="rId2"/>
           <a:stretch>
             <a:fillRect/>
           </a:stretch>
@@ -3167,13 +3167,6 @@
             <a:schemeClr val="lt1"/>
           </a:fontRef>
         </p:style>
-        <p:txBody>
-          <a:bodyPr rtlCol="0" anchor="ctr"/>
-          <a:lstStyle/>
-          <a:p>
-            <a:pPr algn="ctr"/>
-          </a:p>
-        </p:txBody>
       </p:sp>
       <p:sp>
         <p:nvSpPr>
@@ -3337,7 +3330,7 @@
 </file>
 
 <file path=ppt/slides/slide10.xml><?xml version="1.0" encoding="utf-8"?>
-<p:sld xmlns:a="http://schemas.openxmlformats.org/drawingml/2006/main" xmlns:p="http://schemas.openxmlformats.org/presentationml/2006/main" xmlns:r="http://schemas.openxmlformats.org/officeDocument/2006/relationships">
+<p:sld xmlns:a="http://schemas.openxmlformats.org/drawingml/2006/main" xmlns:ns2="http://schemas.openxmlformats.org/officeDocument/2006/relationships" xmlns:p="http://schemas.openxmlformats.org/presentationml/2006/main">
   <p:cSld>
     <p:spTree>
       <p:nvGrpSpPr>
@@ -3381,13 +3374,6 @@
             <a:schemeClr val="lt1"/>
           </a:fontRef>
         </p:style>
-        <p:txBody>
-          <a:bodyPr rtlCol="0" anchor="ctr"/>
-          <a:lstStyle/>
-          <a:p>
-            <a:pPr algn="ctr"/>
-          </a:p>
-        </p:txBody>
       </p:sp>
       <p:pic>
         <p:nvPicPr>
@@ -3398,7 +3384,7 @@
           <p:nvPr/>
         </p:nvPicPr>
         <p:blipFill>
-          <a:blip r:embed="rId2"/>
+          <a:blip ns2:embed="rId2"/>
           <a:stretch>
             <a:fillRect/>
           </a:stretch>
@@ -3579,7 +3565,7 @@
           <p:nvPr/>
         </p:nvPicPr>
         <p:blipFill>
-          <a:blip r:embed="rId3"/>
+          <a:blip ns2:embed="rId3"/>
           <a:stretch>
             <a:fillRect/>
           </a:stretch>
@@ -3610,43 +3596,77 @@
           </a:prstGeom>
           <a:noFill/>
         </p:spPr>
+      </p:sp>
+      <p:sp>
+        <p:nvSpPr>
+          <p:cNvPr id="9" name="MATH_BODY"/>
+          <p:cNvSpPr txBox="1"/>
+          <p:nvPr/>
+        </p:nvSpPr>
+        <p:spPr>
+          <a:xfrm>
+            <a:off x="6949440" y="2670048"/>
+            <a:ext cx="4334255" cy="361736"/>
+          </a:xfrm>
+          <a:prstGeom prst="rect">
+            <a:avLst/>
+          </a:prstGeom>
+          <a:noFill/>
+        </p:spPr>
         <p:txBody>
           <a:bodyPr wrap="square" lIns="0" rIns="0" tIns="0" bIns="0">
             <a:spAutoFit/>
           </a:bodyPr>
           <a:lstStyle/>
           <a:p>
-            <a:pPr algn="r">
-              <a:spcBef>
-                <a:spcPts val="0"/>
-              </a:spcBef>
-              <a:spcAft>
-                <a:spcPts val="0"/>
-              </a:spcAft>
-            </a:pPr>
-            <a:r>
-              <a:rPr sz="2300" b="1">
-                <a:solidFill>
-                  <a:srgbClr val="4E4E4E"/>
-                </a:solidFill>
-                <a:latin typeface="Times New Roman"/>
-                <a:ea typeface="Times New Roman"/>
-                <a:cs typeface="Times New Roman"/>
-              </a:rPr>
-              <a:t/>
-            </a:r>
-          </a:p>
-        </p:txBody>
-      </p:sp>
-      <p:sp>
-        <p:nvSpPr>
-          <p:cNvPr id="9" name="MATH_BODY"/>
-          <p:cNvSpPr txBox="1"/>
-          <p:nvPr/>
-        </p:nvSpPr>
-        <p:spPr>
-          <a:xfrm>
-            <a:off x="6949440" y="2670048"/>
+            <a:pPr algn="l">
+              <a:spcBef>
+                <a:spcPts val="0"/>
+              </a:spcBef>
+              <a:spcAft>
+                <a:spcPts val="0"/>
+              </a:spcAft>
+            </a:pPr>
+            <a:r>
+              <a:rPr sz="2300" b="0">
+                <a:solidFill>
+                  <a:srgbClr val="000000"/>
+                </a:solidFill>
+                <a:latin typeface="Times New Roman"/>
+                <a:ea typeface="Times New Roman"/>
+                <a:cs typeface="Times New Roman"/>
+              </a:rPr>
+              <a:t>|∇T(x)| F(x) = 1</a:t>
+            </a:r>
+          </a:p>
+        </p:txBody>
+      </p:sp>
+      <p:sp>
+        <p:nvSpPr>
+          <p:cNvPr id="10" name="MATH_LABEL"/>
+          <p:cNvSpPr txBox="1"/>
+          <p:nvPr/>
+        </p:nvSpPr>
+        <p:spPr>
+          <a:xfrm>
+            <a:off x="6163056" y="3090672"/>
+            <a:ext cx="640080" cy="361736"/>
+          </a:xfrm>
+          <a:prstGeom prst="rect">
+            <a:avLst/>
+          </a:prstGeom>
+          <a:noFill/>
+        </p:spPr>
+      </p:sp>
+      <p:sp>
+        <p:nvSpPr>
+          <p:cNvPr id="11" name="MATH_BODY"/>
+          <p:cNvSpPr txBox="1"/>
+          <p:nvPr/>
+        </p:nvSpPr>
+        <p:spPr>
+          <a:xfrm>
+            <a:off x="6949440" y="3090672"/>
             <a:ext cx="4334255" cy="361736"/>
           </a:xfrm>
           <a:prstGeom prst="rect">
@@ -3669,29 +3689,46 @@
               </a:spcAft>
             </a:pPr>
             <a:r>
-              <a:rPr sz="2300" b="0">
-                <a:solidFill>
-                  <a:srgbClr val="000000"/>
-                </a:solidFill>
-                <a:latin typeface="Times New Roman"/>
-                <a:ea typeface="Times New Roman"/>
-                <a:cs typeface="Times New Roman"/>
-              </a:rPr>
-              <a:t>|∇T(x)| F(x) = 1</a:t>
-            </a:r>
-          </a:p>
-        </p:txBody>
-      </p:sp>
-      <p:sp>
-        <p:nvSpPr>
-          <p:cNvPr id="10" name="MATH_LABEL"/>
-          <p:cNvSpPr txBox="1"/>
-          <p:nvPr/>
-        </p:nvSpPr>
-        <p:spPr>
-          <a:xfrm>
-            <a:off x="6163056" y="3090672"/>
+              <a:rPr sz="1880" b="0">
+                <a:solidFill>
+                  <a:srgbClr val="000000"/>
+                </a:solidFill>
+                <a:latin typeface="Times New Roman"/>
+                <a:ea typeface="Times New Roman"/>
+                <a:cs typeface="Times New Roman"/>
+              </a:rPr>
+              <a:t>F(x) = md(x) + (v_slow − mr),  d(x) ≤ d_safe</a:t>
+            </a:r>
+          </a:p>
+        </p:txBody>
+      </p:sp>
+      <p:sp>
+        <p:nvSpPr>
+          <p:cNvPr id="12" name="MATH_LABEL"/>
+          <p:cNvSpPr txBox="1"/>
+          <p:nvPr/>
+        </p:nvSpPr>
+        <p:spPr>
+          <a:xfrm>
+            <a:off x="6163056" y="3511296"/>
             <a:ext cx="640080" cy="361736"/>
+          </a:xfrm>
+          <a:prstGeom prst="rect">
+            <a:avLst/>
+          </a:prstGeom>
+          <a:noFill/>
+        </p:spPr>
+      </p:sp>
+      <p:sp>
+        <p:nvSpPr>
+          <p:cNvPr id="13" name="MATH_BODY"/>
+          <p:cNvSpPr txBox="1"/>
+          <p:nvPr/>
+        </p:nvSpPr>
+        <p:spPr>
+          <a:xfrm>
+            <a:off x="6949440" y="3511296"/>
+            <a:ext cx="4334255" cy="361736"/>
           </a:xfrm>
           <a:prstGeom prst="rect">
             <a:avLst/>
@@ -3704,138 +3741,6 @@
           </a:bodyPr>
           <a:lstStyle/>
           <a:p>
-            <a:pPr algn="r">
-              <a:spcBef>
-                <a:spcPts val="0"/>
-              </a:spcBef>
-              <a:spcAft>
-                <a:spcPts val="0"/>
-              </a:spcAft>
-            </a:pPr>
-            <a:r>
-              <a:rPr sz="1880" b="1">
-                <a:solidFill>
-                  <a:srgbClr val="4E4E4E"/>
-                </a:solidFill>
-                <a:latin typeface="Times New Roman"/>
-                <a:ea typeface="Times New Roman"/>
-                <a:cs typeface="Times New Roman"/>
-              </a:rPr>
-              <a:t/>
-            </a:r>
-          </a:p>
-        </p:txBody>
-      </p:sp>
-      <p:sp>
-        <p:nvSpPr>
-          <p:cNvPr id="11" name="MATH_BODY"/>
-          <p:cNvSpPr txBox="1"/>
-          <p:nvPr/>
-        </p:nvSpPr>
-        <p:spPr>
-          <a:xfrm>
-            <a:off x="6949440" y="3090672"/>
-            <a:ext cx="4334255" cy="361736"/>
-          </a:xfrm>
-          <a:prstGeom prst="rect">
-            <a:avLst/>
-          </a:prstGeom>
-          <a:noFill/>
-        </p:spPr>
-        <p:txBody>
-          <a:bodyPr wrap="square" lIns="0" rIns="0" tIns="0" bIns="0">
-            <a:spAutoFit/>
-          </a:bodyPr>
-          <a:lstStyle/>
-          <a:p>
-            <a:pPr algn="l">
-              <a:spcBef>
-                <a:spcPts val="0"/>
-              </a:spcBef>
-              <a:spcAft>
-                <a:spcPts val="0"/>
-              </a:spcAft>
-            </a:pPr>
-            <a:r>
-              <a:rPr sz="1880" b="0">
-                <a:solidFill>
-                  <a:srgbClr val="000000"/>
-                </a:solidFill>
-                <a:latin typeface="Times New Roman"/>
-                <a:ea typeface="Times New Roman"/>
-                <a:cs typeface="Times New Roman"/>
-              </a:rPr>
-              <a:t>F(x) = md(x) + (v_slow − mr),  d(x) ≤ d_safe</a:t>
-            </a:r>
-          </a:p>
-        </p:txBody>
-      </p:sp>
-      <p:sp>
-        <p:nvSpPr>
-          <p:cNvPr id="12" name="MATH_LABEL"/>
-          <p:cNvSpPr txBox="1"/>
-          <p:nvPr/>
-        </p:nvSpPr>
-        <p:spPr>
-          <a:xfrm>
-            <a:off x="6163056" y="3511296"/>
-            <a:ext cx="640080" cy="361736"/>
-          </a:xfrm>
-          <a:prstGeom prst="rect">
-            <a:avLst/>
-          </a:prstGeom>
-          <a:noFill/>
-        </p:spPr>
-        <p:txBody>
-          <a:bodyPr wrap="square" lIns="0" rIns="0" tIns="0" bIns="0">
-            <a:spAutoFit/>
-          </a:bodyPr>
-          <a:lstStyle/>
-          <a:p>
-            <a:pPr algn="r">
-              <a:spcBef>
-                <a:spcPts val="0"/>
-              </a:spcBef>
-              <a:spcAft>
-                <a:spcPts val="0"/>
-              </a:spcAft>
-            </a:pPr>
-            <a:r>
-              <a:rPr sz="1880" b="1">
-                <a:solidFill>
-                  <a:srgbClr val="4E4E4E"/>
-                </a:solidFill>
-                <a:latin typeface="Times New Roman"/>
-                <a:ea typeface="Times New Roman"/>
-                <a:cs typeface="Times New Roman"/>
-              </a:rPr>
-              <a:t/>
-            </a:r>
-          </a:p>
-        </p:txBody>
-      </p:sp>
-      <p:sp>
-        <p:nvSpPr>
-          <p:cNvPr id="13" name="MATH_BODY"/>
-          <p:cNvSpPr txBox="1"/>
-          <p:nvPr/>
-        </p:nvSpPr>
-        <p:spPr>
-          <a:xfrm>
-            <a:off x="6949440" y="3511296"/>
-            <a:ext cx="4334255" cy="361736"/>
-          </a:xfrm>
-          <a:prstGeom prst="rect">
-            <a:avLst/>
-          </a:prstGeom>
-          <a:noFill/>
-        </p:spPr>
-        <p:txBody>
-          <a:bodyPr wrap="square" lIns="0" rIns="0" tIns="0" bIns="0">
-            <a:spAutoFit/>
-          </a:bodyPr>
-          <a:lstStyle/>
-          <a:p>
             <a:pPr algn="l">
               <a:spcBef>
                 <a:spcPts val="0"/>
@@ -3874,33 +3779,6 @@
           </a:prstGeom>
           <a:noFill/>
         </p:spPr>
-        <p:txBody>
-          <a:bodyPr wrap="square" lIns="0" rIns="0" tIns="0" bIns="0">
-            <a:spAutoFit/>
-          </a:bodyPr>
-          <a:lstStyle/>
-          <a:p>
-            <a:pPr algn="r">
-              <a:spcBef>
-                <a:spcPts val="0"/>
-              </a:spcBef>
-              <a:spcAft>
-                <a:spcPts val="0"/>
-              </a:spcAft>
-            </a:pPr>
-            <a:r>
-              <a:rPr sz="1880" b="1">
-                <a:solidFill>
-                  <a:srgbClr val="4E4E4E"/>
-                </a:solidFill>
-                <a:latin typeface="Times New Roman"/>
-                <a:ea typeface="Times New Roman"/>
-                <a:cs typeface="Times New Roman"/>
-              </a:rPr>
-              <a:t/>
-            </a:r>
-          </a:p>
-        </p:txBody>
       </p:sp>
       <p:sp>
         <p:nvSpPr>
@@ -4037,7 +3915,7 @@
 </file>
 
 <file path=ppt/slides/slide11.xml><?xml version="1.0" encoding="utf-8"?>
-<p:sld xmlns:a="http://schemas.openxmlformats.org/drawingml/2006/main" xmlns:p="http://schemas.openxmlformats.org/presentationml/2006/main" xmlns:r="http://schemas.openxmlformats.org/officeDocument/2006/relationships">
+<p:sld xmlns:a="http://schemas.openxmlformats.org/drawingml/2006/main" xmlns:ns2="http://schemas.openxmlformats.org/officeDocument/2006/relationships" xmlns:p="http://schemas.openxmlformats.org/presentationml/2006/main">
   <p:cSld>
     <p:spTree>
       <p:nvGrpSpPr>
@@ -4081,13 +3959,6 @@
             <a:schemeClr val="lt1"/>
           </a:fontRef>
         </p:style>
-        <p:txBody>
-          <a:bodyPr rtlCol="0" anchor="ctr"/>
-          <a:lstStyle/>
-          <a:p>
-            <a:pPr algn="ctr"/>
-          </a:p>
-        </p:txBody>
       </p:sp>
       <p:pic>
         <p:nvPicPr>
@@ -4098,7 +3969,7 @@
           <p:nvPr/>
         </p:nvPicPr>
         <p:blipFill>
-          <a:blip r:embed="rId2"/>
+          <a:blip ns2:embed="rId2"/>
           <a:stretch>
             <a:fillRect/>
           </a:stretch>
@@ -4583,33 +4454,6 @@
           </a:prstGeom>
           <a:noFill/>
         </p:spPr>
-        <p:txBody>
-          <a:bodyPr wrap="square" lIns="0" rIns="0" tIns="0" bIns="0">
-            <a:spAutoFit/>
-          </a:bodyPr>
-          <a:lstStyle/>
-          <a:p>
-            <a:pPr algn="r">
-              <a:spcBef>
-                <a:spcPts val="0"/>
-              </a:spcBef>
-              <a:spcAft>
-                <a:spcPts val="0"/>
-              </a:spcAft>
-            </a:pPr>
-            <a:r>
-              <a:rPr sz="1839" b="1">
-                <a:solidFill>
-                  <a:srgbClr val="4E4E4E"/>
-                </a:solidFill>
-                <a:latin typeface="Times New Roman"/>
-                <a:ea typeface="Times New Roman"/>
-                <a:cs typeface="Times New Roman"/>
-              </a:rPr>
-              <a:t/>
-            </a:r>
-          </a:p>
-        </p:txBody>
       </p:sp>
       <p:sp>
         <p:nvSpPr>
@@ -5459,7 +5303,7 @@
 </file>
 
 <file path=ppt/slides/slide12.xml><?xml version="1.0" encoding="utf-8"?>
-<p:sld xmlns:a="http://schemas.openxmlformats.org/drawingml/2006/main" xmlns:p="http://schemas.openxmlformats.org/presentationml/2006/main" xmlns:r="http://schemas.openxmlformats.org/officeDocument/2006/relationships">
+<p:sld xmlns:a="http://schemas.openxmlformats.org/drawingml/2006/main" xmlns:ns2="http://schemas.openxmlformats.org/officeDocument/2006/relationships" xmlns:p="http://schemas.openxmlformats.org/presentationml/2006/main">
   <p:cSld>
     <p:spTree>
       <p:nvGrpSpPr>
@@ -5503,13 +5347,6 @@
             <a:schemeClr val="lt1"/>
           </a:fontRef>
         </p:style>
-        <p:txBody>
-          <a:bodyPr rtlCol="0" anchor="ctr"/>
-          <a:lstStyle/>
-          <a:p>
-            <a:pPr algn="ctr"/>
-          </a:p>
-        </p:txBody>
       </p:sp>
       <p:pic>
         <p:nvPicPr>
@@ -5520,7 +5357,7 @@
           <p:nvPr/>
         </p:nvPicPr>
         <p:blipFill>
-          <a:blip r:embed="rId2"/>
+          <a:blip ns2:embed="rId2"/>
           <a:stretch>
             <a:fillRect/>
           </a:stretch>
@@ -5679,7 +5516,7 @@
           <p:nvPr/>
         </p:nvPicPr>
         <p:blipFill>
-          <a:blip r:embed="rId3"/>
+          <a:blip ns2:embed="rId3"/>
           <a:stretch>
             <a:fillRect/>
           </a:stretch>
@@ -5798,33 +5635,6 @@
           </a:prstGeom>
           <a:noFill/>
         </p:spPr>
-        <p:txBody>
-          <a:bodyPr wrap="square" lIns="0" rIns="0" tIns="0" bIns="0">
-            <a:spAutoFit/>
-          </a:bodyPr>
-          <a:lstStyle/>
-          <a:p>
-            <a:pPr algn="r">
-              <a:spcBef>
-                <a:spcPts val="0"/>
-              </a:spcBef>
-              <a:spcAft>
-                <a:spcPts val="0"/>
-              </a:spcAft>
-            </a:pPr>
-            <a:r>
-              <a:rPr sz="1830" b="1">
-                <a:solidFill>
-                  <a:srgbClr val="4E4E4E"/>
-                </a:solidFill>
-                <a:latin typeface="Times New Roman"/>
-                <a:ea typeface="Times New Roman"/>
-                <a:cs typeface="Times New Roman"/>
-              </a:rPr>
-              <a:t/>
-            </a:r>
-          </a:p>
-        </p:txBody>
       </p:sp>
       <p:sp>
         <p:nvSpPr>
@@ -6032,7 +5842,7 @@
 </file>
 
 <file path=ppt/slides/slide13.xml><?xml version="1.0" encoding="utf-8"?>
-<p:sld xmlns:a="http://schemas.openxmlformats.org/drawingml/2006/main" xmlns:p="http://schemas.openxmlformats.org/presentationml/2006/main" xmlns:r="http://schemas.openxmlformats.org/officeDocument/2006/relationships">
+<p:sld xmlns:a="http://schemas.openxmlformats.org/drawingml/2006/main" xmlns:ns2="http://schemas.openxmlformats.org/officeDocument/2006/relationships" xmlns:p="http://schemas.openxmlformats.org/presentationml/2006/main">
   <p:cSld>
     <p:spTree>
       <p:nvGrpSpPr>
@@ -6076,13 +5886,6 @@
             <a:schemeClr val="lt1"/>
           </a:fontRef>
         </p:style>
-        <p:txBody>
-          <a:bodyPr rtlCol="0" anchor="ctr"/>
-          <a:lstStyle/>
-          <a:p>
-            <a:pPr algn="ctr"/>
-          </a:p>
-        </p:txBody>
       </p:sp>
       <p:pic>
         <p:nvPicPr>
@@ -6093,7 +5896,7 @@
           <p:nvPr/>
         </p:nvPicPr>
         <p:blipFill>
-          <a:blip r:embed="rId2"/>
+          <a:blip ns2:embed="rId2"/>
           <a:stretch>
             <a:fillRect/>
           </a:stretch>
@@ -7012,7 +6815,7 @@
 </file>
 
 <file path=ppt/slides/slide14.xml><?xml version="1.0" encoding="utf-8"?>
-<p:sld xmlns:a="http://schemas.openxmlformats.org/drawingml/2006/main" xmlns:p="http://schemas.openxmlformats.org/presentationml/2006/main" xmlns:r="http://schemas.openxmlformats.org/officeDocument/2006/relationships">
+<p:sld xmlns:a="http://schemas.openxmlformats.org/drawingml/2006/main" xmlns:ns2="http://schemas.openxmlformats.org/officeDocument/2006/relationships" xmlns:p="http://schemas.openxmlformats.org/presentationml/2006/main">
   <p:cSld>
     <p:spTree>
       <p:nvGrpSpPr>
@@ -7056,13 +6859,6 @@
             <a:schemeClr val="lt1"/>
           </a:fontRef>
         </p:style>
-        <p:txBody>
-          <a:bodyPr rtlCol="0" anchor="ctr"/>
-          <a:lstStyle/>
-          <a:p>
-            <a:pPr algn="ctr"/>
-          </a:p>
-        </p:txBody>
       </p:sp>
       <p:pic>
         <p:nvPicPr>
@@ -7073,7 +6869,7 @@
           <p:nvPr/>
         </p:nvPicPr>
         <p:blipFill>
-          <a:blip r:embed="rId2"/>
+          <a:blip ns2:embed="rId2"/>
           <a:stretch>
             <a:fillRect/>
           </a:stretch>
@@ -7994,7 +7790,7 @@
 </file>
 
 <file path=ppt/slides/slide15.xml><?xml version="1.0" encoding="utf-8"?>
-<p:sld xmlns:a="http://schemas.openxmlformats.org/drawingml/2006/main" xmlns:p="http://schemas.openxmlformats.org/presentationml/2006/main" xmlns:r="http://schemas.openxmlformats.org/officeDocument/2006/relationships">
+<p:sld xmlns:a="http://schemas.openxmlformats.org/drawingml/2006/main" xmlns:ns2="http://schemas.openxmlformats.org/officeDocument/2006/relationships" xmlns:p="http://schemas.openxmlformats.org/presentationml/2006/main">
   <p:cSld>
     <p:spTree>
       <p:nvGrpSpPr>
@@ -8038,13 +7834,6 @@
             <a:schemeClr val="lt1"/>
           </a:fontRef>
         </p:style>
-        <p:txBody>
-          <a:bodyPr rtlCol="0" anchor="ctr"/>
-          <a:lstStyle/>
-          <a:p>
-            <a:pPr algn="ctr"/>
-          </a:p>
-        </p:txBody>
       </p:sp>
       <p:pic>
         <p:nvPicPr>
@@ -8055,7 +7844,7 @@
           <p:nvPr/>
         </p:nvPicPr>
         <p:blipFill>
-          <a:blip r:embed="rId2"/>
+          <a:blip ns2:embed="rId2"/>
           <a:stretch>
             <a:fillRect/>
           </a:stretch>
@@ -8214,7 +8003,7 @@
           <p:nvPr/>
         </p:nvPicPr>
         <p:blipFill>
-          <a:blip r:embed="rId3"/>
+          <a:blip ns2:embed="rId3"/>
           <a:stretch>
             <a:fillRect/>
           </a:stretch>
@@ -8410,7 +8199,7 @@
 </file>
 
 <file path=ppt/slides/slide16.xml><?xml version="1.0" encoding="utf-8"?>
-<p:sld xmlns:a="http://schemas.openxmlformats.org/drawingml/2006/main" xmlns:p="http://schemas.openxmlformats.org/presentationml/2006/main" xmlns:r="http://schemas.openxmlformats.org/officeDocument/2006/relationships">
+<p:sld xmlns:a="http://schemas.openxmlformats.org/drawingml/2006/main" xmlns:ns2="http://schemas.openxmlformats.org/officeDocument/2006/relationships" xmlns:p="http://schemas.openxmlformats.org/presentationml/2006/main">
   <p:cSld>
     <p:spTree>
       <p:nvGrpSpPr>
@@ -8454,13 +8243,6 @@
             <a:schemeClr val="lt1"/>
           </a:fontRef>
         </p:style>
-        <p:txBody>
-          <a:bodyPr rtlCol="0" anchor="ctr"/>
-          <a:lstStyle/>
-          <a:p>
-            <a:pPr algn="ctr"/>
-          </a:p>
-        </p:txBody>
       </p:sp>
       <p:pic>
         <p:nvPicPr>
@@ -8471,7 +8253,7 @@
           <p:nvPr/>
         </p:nvPicPr>
         <p:blipFill>
-          <a:blip r:embed="rId2"/>
+          <a:blip ns2:embed="rId2"/>
           <a:stretch>
             <a:fillRect/>
           </a:stretch>
@@ -8674,7 +8456,7 @@
           <p:nvPr/>
         </p:nvPicPr>
         <p:blipFill>
-          <a:blip r:embed="rId3"/>
+          <a:blip ns2:embed="rId3"/>
           <a:stretch>
             <a:fillRect/>
           </a:stretch>
@@ -9358,7 +9140,7 @@
 </file>
 
 <file path=ppt/slides/slide17.xml><?xml version="1.0" encoding="utf-8"?>
-<p:sld xmlns:a="http://schemas.openxmlformats.org/drawingml/2006/main" xmlns:p="http://schemas.openxmlformats.org/presentationml/2006/main" xmlns:r="http://schemas.openxmlformats.org/officeDocument/2006/relationships">
+<p:sld xmlns:a="http://schemas.openxmlformats.org/drawingml/2006/main" xmlns:ns2="http://schemas.openxmlformats.org/officeDocument/2006/relationships" xmlns:p="http://schemas.openxmlformats.org/presentationml/2006/main">
   <p:cSld>
     <p:spTree>
       <p:nvGrpSpPr>
@@ -9402,13 +9184,6 @@
             <a:schemeClr val="lt1"/>
           </a:fontRef>
         </p:style>
-        <p:txBody>
-          <a:bodyPr rtlCol="0" anchor="ctr"/>
-          <a:lstStyle/>
-          <a:p>
-            <a:pPr algn="ctr"/>
-          </a:p>
-        </p:txBody>
       </p:sp>
       <p:pic>
         <p:nvPicPr>
@@ -9419,7 +9194,7 @@
           <p:nvPr/>
         </p:nvPicPr>
         <p:blipFill>
-          <a:blip r:embed="rId2"/>
+          <a:blip ns2:embed="rId2"/>
           <a:stretch>
             <a:fillRect/>
           </a:stretch>
@@ -9578,7 +9353,7 @@
           <p:nvPr/>
         </p:nvPicPr>
         <p:blipFill>
-          <a:blip r:embed="rId3"/>
+          <a:blip ns2:embed="rId3"/>
           <a:stretch>
             <a:fillRect/>
           </a:stretch>
@@ -9779,7 +9554,7 @@
 </file>
 
 <file path=ppt/slides/slide18.xml><?xml version="1.0" encoding="utf-8"?>
-<p:sld xmlns:a="http://schemas.openxmlformats.org/drawingml/2006/main" xmlns:p="http://schemas.openxmlformats.org/presentationml/2006/main" xmlns:r="http://schemas.openxmlformats.org/officeDocument/2006/relationships">
+<p:sld xmlns:a="http://schemas.openxmlformats.org/drawingml/2006/main" xmlns:ns2="http://schemas.openxmlformats.org/officeDocument/2006/relationships" xmlns:p="http://schemas.openxmlformats.org/presentationml/2006/main">
   <p:cSld>
     <p:spTree>
       <p:nvGrpSpPr>
@@ -9823,13 +9598,6 @@
             <a:schemeClr val="lt1"/>
           </a:fontRef>
         </p:style>
-        <p:txBody>
-          <a:bodyPr rtlCol="0" anchor="ctr"/>
-          <a:lstStyle/>
-          <a:p>
-            <a:pPr algn="ctr"/>
-          </a:p>
-        </p:txBody>
       </p:sp>
       <p:pic>
         <p:nvPicPr>
@@ -9840,7 +9608,7 @@
           <p:nvPr/>
         </p:nvPicPr>
         <p:blipFill>
-          <a:blip r:embed="rId2"/>
+          <a:blip ns2:embed="rId2"/>
           <a:stretch>
             <a:fillRect/>
           </a:stretch>
@@ -10021,7 +9789,7 @@
           <p:nvPr/>
         </p:nvPicPr>
         <p:blipFill>
-          <a:blip r:embed="rId3"/>
+          <a:blip ns2:embed="rId3"/>
           <a:stretch>
             <a:fillRect/>
           </a:stretch>
@@ -10045,7 +9813,7 @@
           <p:nvPr/>
         </p:nvPicPr>
         <p:blipFill>
-          <a:blip r:embed="rId4"/>
+          <a:blip ns2:embed="rId4"/>
           <a:stretch>
             <a:fillRect/>
           </a:stretch>
@@ -10175,7 +9943,7 @@
 </file>
 
 <file path=ppt/slides/slide19.xml><?xml version="1.0" encoding="utf-8"?>
-<p:sld xmlns:a="http://schemas.openxmlformats.org/drawingml/2006/main" xmlns:p="http://schemas.openxmlformats.org/presentationml/2006/main" xmlns:r="http://schemas.openxmlformats.org/officeDocument/2006/relationships">
+<p:sld xmlns:a="http://schemas.openxmlformats.org/drawingml/2006/main" xmlns:ns2="http://schemas.openxmlformats.org/officeDocument/2006/relationships" xmlns:p="http://schemas.openxmlformats.org/presentationml/2006/main">
   <p:cSld>
     <p:spTree>
       <p:nvGrpSpPr>
@@ -10219,13 +9987,6 @@
             <a:schemeClr val="lt1"/>
           </a:fontRef>
         </p:style>
-        <p:txBody>
-          <a:bodyPr rtlCol="0" anchor="ctr"/>
-          <a:lstStyle/>
-          <a:p>
-            <a:pPr algn="ctr"/>
-          </a:p>
-        </p:txBody>
       </p:sp>
       <p:pic>
         <p:nvPicPr>
@@ -10236,7 +9997,7 @@
           <p:nvPr/>
         </p:nvPicPr>
         <p:blipFill>
-          <a:blip r:embed="rId2"/>
+          <a:blip ns2:embed="rId2"/>
           <a:stretch>
             <a:fillRect/>
           </a:stretch>
@@ -11173,7 +10934,7 @@
 </file>
 
 <file path=ppt/slides/slide2.xml><?xml version="1.0" encoding="utf-8"?>
-<p:sld xmlns:a="http://schemas.openxmlformats.org/drawingml/2006/main" xmlns:p="http://schemas.openxmlformats.org/presentationml/2006/main" xmlns:r="http://schemas.openxmlformats.org/officeDocument/2006/relationships">
+<p:sld xmlns:a="http://schemas.openxmlformats.org/drawingml/2006/main" xmlns:ns2="http://schemas.openxmlformats.org/officeDocument/2006/relationships" xmlns:p="http://schemas.openxmlformats.org/presentationml/2006/main">
   <p:cSld>
     <p:spTree>
       <p:nvGrpSpPr>
@@ -11217,13 +10978,6 @@
             <a:schemeClr val="lt1"/>
           </a:fontRef>
         </p:style>
-        <p:txBody>
-          <a:bodyPr rtlCol="0" anchor="ctr"/>
-          <a:lstStyle/>
-          <a:p>
-            <a:pPr algn="ctr"/>
-          </a:p>
-        </p:txBody>
       </p:sp>
       <p:pic>
         <p:nvPicPr>
@@ -11234,7 +10988,7 @@
           <p:nvPr/>
         </p:nvPicPr>
         <p:blipFill>
-          <a:blip r:embed="rId2"/>
+          <a:blip ns2:embed="rId2"/>
           <a:stretch>
             <a:fillRect/>
           </a:stretch>
@@ -12272,7 +12026,7 @@
 </file>
 
 <file path=ppt/slides/slide20.xml><?xml version="1.0" encoding="utf-8"?>
-<p:sld xmlns:a="http://schemas.openxmlformats.org/drawingml/2006/main" xmlns:p="http://schemas.openxmlformats.org/presentationml/2006/main" xmlns:r="http://schemas.openxmlformats.org/officeDocument/2006/relationships">
+<p:sld xmlns:a="http://schemas.openxmlformats.org/drawingml/2006/main" xmlns:ns2="http://schemas.openxmlformats.org/officeDocument/2006/relationships" xmlns:p="http://schemas.openxmlformats.org/presentationml/2006/main">
   <p:cSld>
     <p:spTree>
       <p:nvGrpSpPr>
@@ -12316,13 +12070,6 @@
             <a:schemeClr val="lt1"/>
           </a:fontRef>
         </p:style>
-        <p:txBody>
-          <a:bodyPr rtlCol="0" anchor="ctr"/>
-          <a:lstStyle/>
-          <a:p>
-            <a:pPr algn="ctr"/>
-          </a:p>
-        </p:txBody>
       </p:sp>
       <p:pic>
         <p:nvPicPr>
@@ -12333,7 +12080,7 @@
           <p:nvPr/>
         </p:nvPicPr>
         <p:blipFill>
-          <a:blip r:embed="rId2"/>
+          <a:blip ns2:embed="rId2"/>
           <a:stretch>
             <a:fillRect/>
           </a:stretch>
@@ -13170,7 +12917,7 @@
 </file>
 
 <file path=ppt/slides/slide21.xml><?xml version="1.0" encoding="utf-8"?>
-<p:sld xmlns:a="http://schemas.openxmlformats.org/drawingml/2006/main" xmlns:p="http://schemas.openxmlformats.org/presentationml/2006/main" xmlns:r="http://schemas.openxmlformats.org/officeDocument/2006/relationships">
+<p:sld xmlns:a="http://schemas.openxmlformats.org/drawingml/2006/main" xmlns:ns2="http://schemas.openxmlformats.org/officeDocument/2006/relationships" xmlns:p="http://schemas.openxmlformats.org/presentationml/2006/main">
   <p:cSld>
     <p:spTree>
       <p:nvGrpSpPr>
@@ -13188,7 +12935,7 @@
           <p:nvPr/>
         </p:nvPicPr>
         <p:blipFill>
-          <a:blip r:embed="rId2"/>
+          <a:blip ns2:embed="rId2"/>
           <a:stretch>
             <a:fillRect/>
           </a:stretch>
@@ -13238,13 +12985,6 @@
             <a:schemeClr val="lt1"/>
           </a:fontRef>
         </p:style>
-        <p:txBody>
-          <a:bodyPr rtlCol="0" anchor="ctr"/>
-          <a:lstStyle/>
-          <a:p>
-            <a:pPr algn="ctr"/>
-          </a:p>
-        </p:txBody>
       </p:sp>
       <p:sp>
         <p:nvSpPr>
@@ -13343,7 +13083,7 @@
 </file>
 
 <file path=ppt/slides/slide3.xml><?xml version="1.0" encoding="utf-8"?>
-<p:sld xmlns:a="http://schemas.openxmlformats.org/drawingml/2006/main" xmlns:p="http://schemas.openxmlformats.org/presentationml/2006/main" xmlns:r="http://schemas.openxmlformats.org/officeDocument/2006/relationships">
+<p:sld xmlns:a="http://schemas.openxmlformats.org/drawingml/2006/main" xmlns:ns2="http://schemas.openxmlformats.org/officeDocument/2006/relationships" xmlns:p="http://schemas.openxmlformats.org/presentationml/2006/main">
   <p:cSld>
     <p:spTree>
       <p:nvGrpSpPr>
@@ -13387,13 +13127,6 @@
             <a:schemeClr val="lt1"/>
           </a:fontRef>
         </p:style>
-        <p:txBody>
-          <a:bodyPr rtlCol="0" anchor="ctr"/>
-          <a:lstStyle/>
-          <a:p>
-            <a:pPr algn="ctr"/>
-          </a:p>
-        </p:txBody>
       </p:sp>
       <p:pic>
         <p:nvPicPr>
@@ -13404,7 +13137,7 @@
           <p:nvPr/>
         </p:nvPicPr>
         <p:blipFill>
-          <a:blip r:embed="rId2"/>
+          <a:blip ns2:embed="rId2"/>
           <a:stretch>
             <a:fillRect/>
           </a:stretch>
@@ -14294,7 +14027,7 @@
 </file>
 
 <file path=ppt/slides/slide4.xml><?xml version="1.0" encoding="utf-8"?>
-<p:sld xmlns:a="http://schemas.openxmlformats.org/drawingml/2006/main" xmlns:p="http://schemas.openxmlformats.org/presentationml/2006/main" xmlns:r="http://schemas.openxmlformats.org/officeDocument/2006/relationships">
+<p:sld xmlns:a="http://schemas.openxmlformats.org/drawingml/2006/main" xmlns:ns2="http://schemas.openxmlformats.org/officeDocument/2006/relationships" xmlns:p="http://schemas.openxmlformats.org/presentationml/2006/main">
   <p:cSld>
     <p:spTree>
       <p:nvGrpSpPr>
@@ -14338,13 +14071,6 @@
             <a:schemeClr val="lt1"/>
           </a:fontRef>
         </p:style>
-        <p:txBody>
-          <a:bodyPr rtlCol="0" anchor="ctr"/>
-          <a:lstStyle/>
-          <a:p>
-            <a:pPr algn="ctr"/>
-          </a:p>
-        </p:txBody>
       </p:sp>
       <p:pic>
         <p:nvPicPr>
@@ -14355,7 +14081,7 @@
           <p:nvPr/>
         </p:nvPicPr>
         <p:blipFill>
-          <a:blip r:embed="rId2"/>
+          <a:blip ns2:embed="rId2"/>
           <a:stretch>
             <a:fillRect/>
           </a:stretch>
@@ -15424,7 +15150,7 @@
 </file>
 
 <file path=ppt/slides/slide5.xml><?xml version="1.0" encoding="utf-8"?>
-<p:sld xmlns:a="http://schemas.openxmlformats.org/drawingml/2006/main" xmlns:p="http://schemas.openxmlformats.org/presentationml/2006/main" xmlns:r="http://schemas.openxmlformats.org/officeDocument/2006/relationships">
+<p:sld xmlns:a="http://schemas.openxmlformats.org/drawingml/2006/main" xmlns:ns2="http://schemas.openxmlformats.org/officeDocument/2006/relationships" xmlns:p="http://schemas.openxmlformats.org/presentationml/2006/main">
   <p:cSld>
     <p:spTree>
       <p:nvGrpSpPr>
@@ -15468,13 +15194,6 @@
             <a:schemeClr val="lt1"/>
           </a:fontRef>
         </p:style>
-        <p:txBody>
-          <a:bodyPr rtlCol="0" anchor="ctr"/>
-          <a:lstStyle/>
-          <a:p>
-            <a:pPr algn="ctr"/>
-          </a:p>
-        </p:txBody>
       </p:sp>
       <p:pic>
         <p:nvPicPr>
@@ -15485,7 +15204,7 @@
           <p:nvPr/>
         </p:nvPicPr>
         <p:blipFill>
-          <a:blip r:embed="rId2"/>
+          <a:blip ns2:embed="rId2"/>
           <a:stretch>
             <a:fillRect/>
           </a:stretch>
@@ -16650,7 +16369,7 @@
 </file>
 
 <file path=ppt/slides/slide6.xml><?xml version="1.0" encoding="utf-8"?>
-<p:sld xmlns:a="http://schemas.openxmlformats.org/drawingml/2006/main" xmlns:p="http://schemas.openxmlformats.org/presentationml/2006/main" xmlns:r="http://schemas.openxmlformats.org/officeDocument/2006/relationships">
+<p:sld xmlns:a="http://schemas.openxmlformats.org/drawingml/2006/main" xmlns:ns2="http://schemas.openxmlformats.org/officeDocument/2006/relationships" xmlns:p="http://schemas.openxmlformats.org/presentationml/2006/main">
   <p:cSld>
     <p:spTree>
       <p:nvGrpSpPr>
@@ -16694,13 +16413,6 @@
             <a:schemeClr val="lt1"/>
           </a:fontRef>
         </p:style>
-        <p:txBody>
-          <a:bodyPr rtlCol="0" anchor="ctr"/>
-          <a:lstStyle/>
-          <a:p>
-            <a:pPr algn="ctr"/>
-          </a:p>
-        </p:txBody>
       </p:sp>
       <p:pic>
         <p:nvPicPr>
@@ -16711,7 +16423,7 @@
           <p:nvPr/>
         </p:nvPicPr>
         <p:blipFill>
-          <a:blip r:embed="rId2"/>
+          <a:blip ns2:embed="rId2"/>
           <a:stretch>
             <a:fillRect/>
           </a:stretch>
@@ -17679,7 +17391,7 @@
 </file>
 
 <file path=ppt/slides/slide7.xml><?xml version="1.0" encoding="utf-8"?>
-<p:sld xmlns:a="http://schemas.openxmlformats.org/drawingml/2006/main" xmlns:p="http://schemas.openxmlformats.org/presentationml/2006/main" xmlns:r="http://schemas.openxmlformats.org/officeDocument/2006/relationships">
+<p:sld xmlns:a="http://schemas.openxmlformats.org/drawingml/2006/main" xmlns:ns2="http://schemas.openxmlformats.org/officeDocument/2006/relationships" xmlns:p="http://schemas.openxmlformats.org/presentationml/2006/main">
   <p:cSld>
     <p:spTree>
       <p:nvGrpSpPr>
@@ -17723,13 +17435,6 @@
             <a:schemeClr val="lt1"/>
           </a:fontRef>
         </p:style>
-        <p:txBody>
-          <a:bodyPr rtlCol="0" anchor="ctr"/>
-          <a:lstStyle/>
-          <a:p>
-            <a:pPr algn="ctr"/>
-          </a:p>
-        </p:txBody>
       </p:sp>
       <p:pic>
         <p:nvPicPr>
@@ -17740,7 +17445,7 @@
           <p:nvPr/>
         </p:nvPicPr>
         <p:blipFill>
-          <a:blip r:embed="rId2"/>
+          <a:blip ns2:embed="rId2"/>
           <a:stretch>
             <a:fillRect/>
           </a:stretch>
@@ -18980,7 +18685,7 @@
 </file>
 
 <file path=ppt/slides/slide8.xml><?xml version="1.0" encoding="utf-8"?>
-<p:sld xmlns:a="http://schemas.openxmlformats.org/drawingml/2006/main" xmlns:p="http://schemas.openxmlformats.org/presentationml/2006/main" xmlns:r="http://schemas.openxmlformats.org/officeDocument/2006/relationships">
+<p:sld xmlns:a="http://schemas.openxmlformats.org/drawingml/2006/main" xmlns:ns2="http://schemas.openxmlformats.org/officeDocument/2006/relationships" xmlns:p="http://schemas.openxmlformats.org/presentationml/2006/main">
   <p:cSld>
     <p:spTree>
       <p:nvGrpSpPr>
@@ -19024,13 +18729,6 @@
             <a:schemeClr val="lt1"/>
           </a:fontRef>
         </p:style>
-        <p:txBody>
-          <a:bodyPr rtlCol="0" anchor="ctr"/>
-          <a:lstStyle/>
-          <a:p>
-            <a:pPr algn="ctr"/>
-          </a:p>
-        </p:txBody>
       </p:sp>
       <p:pic>
         <p:nvPicPr>
@@ -19041,7 +18739,7 @@
           <p:nvPr/>
         </p:nvPicPr>
         <p:blipFill>
-          <a:blip r:embed="rId2"/>
+          <a:blip ns2:embed="rId2"/>
           <a:stretch>
             <a:fillRect/>
           </a:stretch>
@@ -20608,7 +20306,7 @@
 </file>
 
 <file path=ppt/slides/slide9.xml><?xml version="1.0" encoding="utf-8"?>
-<p:sld xmlns:a="http://schemas.openxmlformats.org/drawingml/2006/main" xmlns:p="http://schemas.openxmlformats.org/presentationml/2006/main" xmlns:r="http://schemas.openxmlformats.org/officeDocument/2006/relationships">
+<p:sld xmlns:a="http://schemas.openxmlformats.org/drawingml/2006/main" xmlns:ns2="http://schemas.openxmlformats.org/officeDocument/2006/relationships" xmlns:p="http://schemas.openxmlformats.org/presentationml/2006/main">
   <p:cSld>
     <p:spTree>
       <p:nvGrpSpPr>
@@ -20652,13 +20350,6 @@
             <a:schemeClr val="lt1"/>
           </a:fontRef>
         </p:style>
-        <p:txBody>
-          <a:bodyPr rtlCol="0" anchor="ctr"/>
-          <a:lstStyle/>
-          <a:p>
-            <a:pPr algn="ctr"/>
-          </a:p>
-        </p:txBody>
       </p:sp>
       <p:pic>
         <p:nvPicPr>
@@ -20669,7 +20360,7 @@
           <p:nvPr/>
         </p:nvPicPr>
         <p:blipFill>
-          <a:blip r:embed="rId2"/>
+          <a:blip ns2:embed="rId2"/>
           <a:stretch>
             <a:fillRect/>
           </a:stretch>

--- a/skills/uav-paper-report/assets/examples/uav-rl-privileged-report.pptx
+++ b/skills/uav-paper-report/assets/examples/uav-rl-privileged-report.pptx
@@ -3697,7 +3697,7 @@
                 <a:ea typeface="Times New Roman"/>
                 <a:cs typeface="Times New Roman"/>
               </a:rPr>
-              <a:t>F(x) = md(x) + (v_slow − mr),  d(x) ≤ d_safe</a:t>
+              <a:t>F(x) = md(x) + (vₛ − mr),  d(x) ≤ dₛ</a:t>
             </a:r>
           </a:p>
         </p:txBody>
@@ -3758,7 +3758,7 @@
                 <a:ea typeface="Times New Roman"/>
                 <a:cs typeface="Times New Roman"/>
               </a:rPr>
-              <a:t>F(x) = 1,  d(x) &gt; d_safe</a:t>
+              <a:t>F(x) = 1,  d(x) &gt; dₛ</a:t>
             </a:r>
           </a:p>
         </p:txBody>
@@ -3819,7 +3819,7 @@
                 <a:ea typeface="Times New Roman"/>
                 <a:cs typeface="Times New Roman"/>
               </a:rPr>
-              <a:t>m = (d_safe − v_slow) / (d_safe − r)</a:t>
+              <a:t>m = (dₛ − vₛ) / (dₛ − r)</a:t>
             </a:r>
           </a:p>
         </p:txBody>
@@ -3901,7 +3901,7 @@
                 <a:ea typeface="Times New Roman"/>
                 <a:cs typeface="Times New Roman"/>
               </a:rPr>
-              <a:t>• T(x) 是到达目标的最短时间，负梯度给出v^set_k的方向；F(x) 在障碍附近降低传播速度，使路径远离表面。</a:t>
+              <a:t>• T(x) 是到达目标的最短时间，负梯度给出v^setₖ的方向；F(x) 在障碍附近降低传播速度，使路径远离表面。</a:t>
             </a:r>
           </a:p>
         </p:txBody>
@@ -5614,7 +5614,7 @@
                 <a:ea typeface="Times New Roman"/>
                 <a:cs typeface="Times New Roman"/>
               </a:rPr>
-              <a:t>ω_d = J(ϕ, θ) [ ϕ_dot, θ_dot, ψ_dot ]^T</a:t>
+              <a:t>ωd = J(ϕ, θ) [ ϕ̇, θ̇, ψ̇ ]^T</a:t>
             </a:r>
           </a:p>
         </p:txBody>
@@ -5675,7 +5675,7 @@
                 <a:ea typeface="Times New Roman"/>
                 <a:cs typeface="Times New Roman"/>
               </a:rPr>
-              <a:t>R_d: z_B ∥ F,  x_B aligned with predicted yaw ψ_d</a:t>
+              <a:t>Rd: zᵦ ∥ F,  xᵦ aligned with predicted yaw ψd</a:t>
             </a:r>
           </a:p>
         </p:txBody>
@@ -5746,7 +5746,7 @@
                 <a:ea typeface="Times New Roman"/>
                 <a:cs typeface="Times New Roman"/>
               </a:rPr>
-              <a:t>• 加入 ω_d后，期望pitch/roll与实际响应更同步。</a:t>
+              <a:t>• 加入 ωd后，期望pitch/roll与实际响应更同步。</a:t>
             </a:r>
           </a:p>
         </p:txBody>
@@ -6378,7 +6378,7 @@
                           <a:ea typeface="Times New Roman"/>
                           <a:cs typeface="Times New Roman"/>
                         </a:rPr>
-                        <a:t>v_target</a:t>
+                        <a:t>vₜ</a:t>
                       </a:r>
                     </a:p>
                   </a:txBody>
@@ -6467,7 +6467,7 @@
                           <a:ea typeface="Times New Roman"/>
                           <a:cs typeface="Times New Roman"/>
                         </a:rPr>
-                        <a:t>v_noise</a:t>
+                        <a:t>vₙ</a:t>
                       </a:r>
                     </a:p>
                   </a:txBody>
@@ -6556,7 +6556,7 @@
                           <a:ea typeface="Times New Roman"/>
                           <a:cs typeface="Times New Roman"/>
                         </a:rPr>
-                        <a:t>r_noise</a:t>
+                        <a:t>rₙ</a:t>
                       </a:r>
                     </a:p>
                   </a:txBody>
@@ -14385,7 +14385,7 @@
                 <a:ea typeface="Times New Roman"/>
                 <a:cs typeface="Times New Roman"/>
               </a:rPr>
-              <a:t>• 策略输出质量归一化推力t_k和预测航向 ψ_k。</a:t>
+              <a:t>• 策略输出质量归一化推力tₖ和预测航向 ψₖ。</a:t>
             </a:r>
           </a:p>
           <a:p>
@@ -15509,7 +15509,7 @@
                 <a:ea typeface="Times New Roman"/>
                 <a:cs typeface="Times New Roman"/>
               </a:rPr>
-              <a:t>目标信息</a:t>
+              <a:t>目标信息vg, dg</a:t>
             </a:r>
             <a:br/>
             <a:r>
@@ -15521,7 +15521,7 @@
                 <a:ea typeface="Times New Roman"/>
                 <a:cs typeface="Times New Roman"/>
               </a:rPr>
-              <a:t>v_goal, d_goal</a:t>
+              <a:t/>
             </a:r>
           </a:p>
         </p:txBody>
@@ -15734,7 +15734,7 @@
                 <a:ea typeface="Times New Roman"/>
                 <a:cs typeface="Times New Roman"/>
               </a:rPr>
-              <a:t>GRU 记忆</a:t>
+              <a:t>GRU 记忆hₖ</a:t>
             </a:r>
             <a:br/>
             <a:r>
@@ -15746,7 +15746,7 @@
                 <a:ea typeface="Times New Roman"/>
                 <a:cs typeface="Times New Roman"/>
               </a:rPr>
-              <a:t>h_k</a:t>
+              <a:t/>
             </a:r>
           </a:p>
         </p:txBody>
@@ -15809,7 +15809,7 @@
                 <a:ea typeface="Times New Roman"/>
                 <a:cs typeface="Times New Roman"/>
               </a:rPr>
-              <a:t>动作输出</a:t>
+              <a:t>动作输出tₖ, ψₖ</a:t>
             </a:r>
             <a:br/>
             <a:r>
@@ -15821,7 +15821,7 @@
                 <a:ea typeface="Times New Roman"/>
                 <a:cs typeface="Times New Roman"/>
               </a:rPr>
-              <a:t>t_k, ψ_k</a:t>
+              <a:t/>
             </a:r>
           </a:p>
         </p:txBody>
@@ -15884,7 +15884,7 @@
                 <a:ea typeface="Times New Roman"/>
                 <a:cs typeface="Times New Roman"/>
               </a:rPr>
-              <a:t>可微动力学</a:t>
+              <a:t>可微动力学sₖ₊₁=f(sₖ,uₖ)</a:t>
             </a:r>
             <a:br/>
             <a:r>
@@ -15896,7 +15896,7 @@
                 <a:ea typeface="Times New Roman"/>
                 <a:cs typeface="Times New Roman"/>
               </a:rPr>
-              <a:t>s_{k+1}=f(s_k,u_k)</a:t>
+              <a:t/>
             </a:r>
           </a:p>
         </p:txBody>
@@ -15959,7 +15959,7 @@
                 <a:ea typeface="Times New Roman"/>
                 <a:cs typeface="Times New Roman"/>
               </a:rPr>
-              <a:t>损失累积</a:t>
+              <a:t>损失累积L = Σ λᵢ Lᵢ</a:t>
             </a:r>
             <a:br/>
             <a:r>
@@ -15971,7 +15971,7 @@
                 <a:ea typeface="Times New Roman"/>
                 <a:cs typeface="Times New Roman"/>
               </a:rPr>
-              <a:t>L = Σ λ_i L_i</a:t>
+              <a:t/>
             </a:r>
           </a:p>
         </p:txBody>
@@ -17156,7 +17156,7 @@
                 <a:ea typeface="Times New Roman"/>
                 <a:cs typeface="Times New Roman"/>
               </a:rPr>
-              <a:t>• p_k、v_k、a_k分别表示位置、速度和加速度，动作中的t_k是质量归一化推力。</a:t>
+              <a:t>• pₖ、vₖ、aₖ分别表示位置、速度和加速度，动作中的tₖ是质量归一化推力。</a:t>
             </a:r>
           </a:p>
           <a:p>
@@ -18200,7 +18200,7 @@
                 <a:ea typeface="Times New Roman"/>
                 <a:cs typeface="Times New Roman"/>
               </a:rPr>
-              <a:t>GRUCell</a:t>
+              <a:t>GRUCellhₖ₋₁→hₖ</a:t>
             </a:r>
             <a:br/>
             <a:r>
@@ -18212,7 +18212,7 @@
                 <a:ea typeface="Times New Roman"/>
                 <a:cs typeface="Times New Roman"/>
               </a:rPr>
-              <a:t>h_{k-1}→h_k</a:t>
+              <a:t/>
             </a:r>
           </a:p>
         </p:txBody>
@@ -18275,7 +18275,7 @@
                 <a:ea typeface="Times New Roman"/>
                 <a:cs typeface="Times New Roman"/>
               </a:rPr>
-              <a:t>Linear 输出</a:t>
+              <a:t>Linear 输出[tₖ, ψₖ]</a:t>
             </a:r>
             <a:br/>
             <a:r>
@@ -18287,7 +18287,7 @@
                 <a:ea typeface="Times New Roman"/>
                 <a:cs typeface="Times New Roman"/>
               </a:rPr>
-              <a:t>[t_k, ψ_k]</a:t>
+              <a:t/>
             </a:r>
           </a:p>
         </p:txBody>
@@ -18649,7 +18649,7 @@
                 <a:ea typeface="Times New Roman"/>
                 <a:cs typeface="Times New Roman"/>
               </a:rPr>
-              <a:t>• 相较固定朝向策略，本文额外预测 ψ_k；相较纯前馈网络，</a:t>
+              <a:t>• 相较固定朝向策略，本文额外预测 ψₖ；相较纯前馈网络，GRU能缓解单帧深度图带来的局部感知不完整。</a:t>
             </a:r>
             <a:r>
               <a:rPr sz="1620" b="1">
@@ -18660,7 +18660,7 @@
                 <a:ea typeface="Times New Roman"/>
                 <a:cs typeface="Times New Roman"/>
               </a:rPr>
-              <a:t>GRU</a:t>
+              <a:t/>
             </a:r>
             <a:r>
               <a:rPr sz="1620" b="0">
@@ -18671,7 +18671,7 @@
                 <a:ea typeface="Times New Roman"/>
                 <a:cs typeface="Times New Roman"/>
               </a:rPr>
-              <a:t>能缓解单帧深度图带来的局部感知不完整。</a:t>
+              <a:t/>
             </a:r>
           </a:p>
         </p:txBody>
